--- a/prezentacie/t06w.pptx
+++ b/prezentacie/t06w.pptx
@@ -249,7 +249,7 @@
           <a:p>
             <a:fld id="{10052495-8BC8-4CFB-94B1-B0429F101A0D}" type="datetimeFigureOut">
               <a:rPr lang="sk-SK" smtClean="0"/>
-              <a:t>2. 10. 2025</a:t>
+              <a:t>5. 10. 2026</a:t>
             </a:fld>
             <a:endParaRPr lang="sk-SK"/>
           </a:p>
@@ -419,7 +419,7 @@
           <a:p>
             <a:fld id="{10052495-8BC8-4CFB-94B1-B0429F101A0D}" type="datetimeFigureOut">
               <a:rPr lang="sk-SK" smtClean="0"/>
-              <a:t>2. 10. 2025</a:t>
+              <a:t>5. 10. 2026</a:t>
             </a:fld>
             <a:endParaRPr lang="sk-SK"/>
           </a:p>
@@ -599,7 +599,7 @@
           <a:p>
             <a:fld id="{10052495-8BC8-4CFB-94B1-B0429F101A0D}" type="datetimeFigureOut">
               <a:rPr lang="sk-SK" smtClean="0"/>
-              <a:t>2. 10. 2025</a:t>
+              <a:t>5. 10. 2026</a:t>
             </a:fld>
             <a:endParaRPr lang="sk-SK"/>
           </a:p>
@@ -769,7 +769,7 @@
           <a:p>
             <a:fld id="{10052495-8BC8-4CFB-94B1-B0429F101A0D}" type="datetimeFigureOut">
               <a:rPr lang="sk-SK" smtClean="0"/>
-              <a:t>2. 10. 2025</a:t>
+              <a:t>5. 10. 2026</a:t>
             </a:fld>
             <a:endParaRPr lang="sk-SK"/>
           </a:p>
@@ -1015,7 +1015,7 @@
           <a:p>
             <a:fld id="{10052495-8BC8-4CFB-94B1-B0429F101A0D}" type="datetimeFigureOut">
               <a:rPr lang="sk-SK" smtClean="0"/>
-              <a:t>2. 10. 2025</a:t>
+              <a:t>5. 10. 2026</a:t>
             </a:fld>
             <a:endParaRPr lang="sk-SK"/>
           </a:p>
@@ -1247,7 +1247,7 @@
           <a:p>
             <a:fld id="{10052495-8BC8-4CFB-94B1-B0429F101A0D}" type="datetimeFigureOut">
               <a:rPr lang="sk-SK" smtClean="0"/>
-              <a:t>2. 10. 2025</a:t>
+              <a:t>5. 10. 2026</a:t>
             </a:fld>
             <a:endParaRPr lang="sk-SK"/>
           </a:p>
@@ -1614,7 +1614,7 @@
           <a:p>
             <a:fld id="{10052495-8BC8-4CFB-94B1-B0429F101A0D}" type="datetimeFigureOut">
               <a:rPr lang="sk-SK" smtClean="0"/>
-              <a:t>2. 10. 2025</a:t>
+              <a:t>5. 10. 2026</a:t>
             </a:fld>
             <a:endParaRPr lang="sk-SK"/>
           </a:p>
@@ -1732,7 +1732,7 @@
           <a:p>
             <a:fld id="{10052495-8BC8-4CFB-94B1-B0429F101A0D}" type="datetimeFigureOut">
               <a:rPr lang="sk-SK" smtClean="0"/>
-              <a:t>2. 10. 2025</a:t>
+              <a:t>5. 10. 2026</a:t>
             </a:fld>
             <a:endParaRPr lang="sk-SK"/>
           </a:p>
@@ -1827,7 +1827,7 @@
           <a:p>
             <a:fld id="{10052495-8BC8-4CFB-94B1-B0429F101A0D}" type="datetimeFigureOut">
               <a:rPr lang="sk-SK" smtClean="0"/>
-              <a:t>2. 10. 2025</a:t>
+              <a:t>5. 10. 2026</a:t>
             </a:fld>
             <a:endParaRPr lang="sk-SK"/>
           </a:p>
@@ -2104,7 +2104,7 @@
           <a:p>
             <a:fld id="{10052495-8BC8-4CFB-94B1-B0429F101A0D}" type="datetimeFigureOut">
               <a:rPr lang="sk-SK" smtClean="0"/>
-              <a:t>2. 10. 2025</a:t>
+              <a:t>5. 10. 2026</a:t>
             </a:fld>
             <a:endParaRPr lang="sk-SK"/>
           </a:p>
@@ -2361,7 +2361,7 @@
           <a:p>
             <a:fld id="{10052495-8BC8-4CFB-94B1-B0429F101A0D}" type="datetimeFigureOut">
               <a:rPr lang="sk-SK" smtClean="0"/>
-              <a:t>2. 10. 2025</a:t>
+              <a:t>5. 10. 2026</a:t>
             </a:fld>
             <a:endParaRPr lang="sk-SK"/>
           </a:p>
@@ -2574,7 +2574,7 @@
           <a:p>
             <a:fld id="{10052495-8BC8-4CFB-94B1-B0429F101A0D}" type="datetimeFigureOut">
               <a:rPr lang="sk-SK" smtClean="0"/>
-              <a:t>2. 10. 2025</a:t>
+              <a:t>5. 10. 2026</a:t>
             </a:fld>
             <a:endParaRPr lang="sk-SK"/>
           </a:p>
@@ -3500,7 +3500,15 @@
             </a:br>
             <a:r>
               <a:rPr lang="sk-SK" b="1" dirty="0"/>
-              <a:t>Ing. Jozef Wagner PhD.</a:t>
+              <a:t>Ing. Jozef Wagner</a:t>
+            </a:r>
+            <a:r>
+              <a:rPr lang="en-US" b="1" dirty="0"/>
+              <a:t>,</a:t>
+            </a:r>
+            <a:r>
+              <a:rPr lang="sk-SK" b="1" dirty="0"/>
+              <a:t> PhD.</a:t>
             </a:r>
           </a:p>
           <a:p>
@@ -4214,11 +4222,25 @@
           <a:lstStyle/>
           <a:p>
             <a:r>
-              <a:rPr lang="en-US" sz="4000" dirty="0" err="1"/>
+              <a:rPr lang="en-US" sz="4000" dirty="0" err="1">
+                <a:solidFill>
+                  <a:srgbClr val="FF0000"/>
+                </a:solidFill>
+                <a:highlight>
+                  <a:srgbClr val="00FFFF"/>
+                </a:highlight>
+              </a:rPr>
               <a:t>Aritmetick</a:t>
             </a:r>
             <a:r>
-              <a:rPr lang="sk-SK" sz="4000" dirty="0"/>
+              <a:rPr lang="sk-SK" sz="4000" dirty="0">
+                <a:solidFill>
+                  <a:srgbClr val="FF0000"/>
+                </a:solidFill>
+                <a:highlight>
+                  <a:srgbClr val="00FFFF"/>
+                </a:highlight>
+              </a:rPr>
               <a:t>é operátory</a:t>
             </a:r>
           </a:p>
@@ -4260,6 +4282,9 @@
             </a:pPr>
             <a:r>
               <a:rPr lang="pl-PL" dirty="0">
+                <a:solidFill>
+                  <a:srgbClr val="FF0000"/>
+                </a:solidFill>
                 <a:highlight>
                   <a:srgbClr val="FFFF00"/>
                 </a:highlight>
@@ -4269,6 +4294,9 @@
             </a:r>
             <a:r>
               <a:rPr lang="en-US" dirty="0">
+                <a:solidFill>
+                  <a:srgbClr val="FF0000"/>
+                </a:solidFill>
                 <a:highlight>
                   <a:srgbClr val="FFFF00"/>
                 </a:highlight>
@@ -4285,25 +4313,67 @@
               <a:buNone/>
             </a:pPr>
             <a:r>
-              <a:rPr lang="sk-SK" dirty="0"/>
+              <a:rPr lang="sk-SK" dirty="0">
+                <a:solidFill>
+                  <a:srgbClr val="FF0000"/>
+                </a:solidFill>
+                <a:highlight>
+                  <a:srgbClr val="00FFFF"/>
+                </a:highlight>
+              </a:rPr>
               <a:t>Ak sú obidva </a:t>
             </a:r>
             <a:r>
-              <a:rPr lang="sk-SK" dirty="0" err="1"/>
+              <a:rPr lang="sk-SK" dirty="0" err="1">
+                <a:solidFill>
+                  <a:srgbClr val="FF0000"/>
+                </a:solidFill>
+                <a:highlight>
+                  <a:srgbClr val="00FFFF"/>
+                </a:highlight>
+              </a:rPr>
               <a:t>operandy</a:t>
             </a:r>
             <a:r>
-              <a:rPr lang="sk-SK" dirty="0"/>
+              <a:rPr lang="sk-SK" dirty="0">
+                <a:solidFill>
+                  <a:srgbClr val="FF0000"/>
+                </a:solidFill>
+                <a:highlight>
+                  <a:srgbClr val="00FFFF"/>
+                </a:highlight>
+              </a:rPr>
               <a:t> celé čísla, </a:t>
             </a:r>
             <a:br>
-              <a:rPr lang="en-US" dirty="0"/>
+              <a:rPr lang="en-US" dirty="0">
+                <a:solidFill>
+                  <a:srgbClr val="FF0000"/>
+                </a:solidFill>
+                <a:highlight>
+                  <a:srgbClr val="00FFFF"/>
+                </a:highlight>
+              </a:rPr>
             </a:br>
             <a:r>
-              <a:rPr lang="sk-SK" dirty="0"/>
+              <a:rPr lang="sk-SK" dirty="0">
+                <a:solidFill>
+                  <a:srgbClr val="FF0000"/>
+                </a:solidFill>
+                <a:highlight>
+                  <a:srgbClr val="00FFFF"/>
+                </a:highlight>
+              </a:rPr>
               <a:t>výsledok je celé číslo zaokrúhlené nadol</a:t>
             </a:r>
-            <a:endParaRPr lang="en-US" dirty="0"/>
+            <a:endParaRPr lang="en-US" dirty="0">
+              <a:solidFill>
+                <a:srgbClr val="FF0000"/>
+              </a:solidFill>
+              <a:highlight>
+                <a:srgbClr val="00FFFF"/>
+              </a:highlight>
+            </a:endParaRPr>
           </a:p>
           <a:p>
             <a:pPr marL="0" indent="0">
@@ -4313,25 +4383,22 @@
               <a:buNone/>
             </a:pPr>
             <a:r>
-              <a:rPr lang="sk-SK" sz="2400" dirty="0" err="1">
-                <a:highlight>
-                  <a:srgbClr val="FFFF00"/>
-                </a:highlight>
-                <a:latin typeface="Consolas" panose="020B0609020204030204" pitchFamily="49" charset="0"/>
-              </a:rPr>
-              <a:t>System.out.println</a:t>
-            </a:r>
-            <a:r>
               <a:rPr lang="sk-SK" sz="2400" dirty="0">
-                <a:highlight>
-                  <a:srgbClr val="FFFF00"/>
-                </a:highlight>
-                <a:latin typeface="Consolas" panose="020B0609020204030204" pitchFamily="49" charset="0"/>
-              </a:rPr>
-              <a:t>(7 / 2); // </a:t>
+                <a:solidFill>
+                  <a:srgbClr val="FF0000"/>
+                </a:solidFill>
+                <a:highlight>
+                  <a:srgbClr val="FFFF00"/>
+                </a:highlight>
+                <a:latin typeface="Consolas" panose="020B0609020204030204" pitchFamily="49" charset="0"/>
+              </a:rPr>
+              <a:t>7 / 2; // </a:t>
             </a:r>
             <a:r>
               <a:rPr lang="en-US" sz="2400" dirty="0">
+                <a:solidFill>
+                  <a:srgbClr val="FF0000"/>
+                </a:solidFill>
                 <a:highlight>
                   <a:srgbClr val="FFFF00"/>
                 </a:highlight>
@@ -4348,22 +4415,16 @@
               <a:buNone/>
             </a:pPr>
             <a:r>
-              <a:rPr lang="sk-SK" sz="2400" dirty="0" err="1">
-                <a:highlight>
-                  <a:srgbClr val="FFFF00"/>
-                </a:highlight>
-                <a:latin typeface="Consolas" panose="020B0609020204030204" pitchFamily="49" charset="0"/>
-              </a:rPr>
-              <a:t>System.out.println</a:t>
-            </a:r>
-            <a:r>
               <a:rPr lang="sk-SK" sz="2400" dirty="0">
-                <a:highlight>
-                  <a:srgbClr val="FFFF00"/>
-                </a:highlight>
-                <a:latin typeface="Consolas" panose="020B0609020204030204" pitchFamily="49" charset="0"/>
-              </a:rPr>
-              <a:t>(7.0 / 2); // 3.5</a:t>
+                <a:solidFill>
+                  <a:srgbClr val="FF0000"/>
+                </a:solidFill>
+                <a:highlight>
+                  <a:srgbClr val="FFFF00"/>
+                </a:highlight>
+                <a:latin typeface="Consolas" panose="020B0609020204030204" pitchFamily="49" charset="0"/>
+              </a:rPr>
+              <a:t>7.0 / 2; // 3.5</a:t>
             </a:r>
           </a:p>
           <a:p>
@@ -4527,15 +4588,36 @@
           <a:lstStyle/>
           <a:p>
             <a:r>
-              <a:rPr lang="en-US" sz="4000" dirty="0"/>
+              <a:rPr lang="en-US" sz="4000" dirty="0">
+                <a:solidFill>
+                  <a:srgbClr val="FF0000"/>
+                </a:solidFill>
+                <a:highlight>
+                  <a:srgbClr val="00FFFF"/>
+                </a:highlight>
+              </a:rPr>
               <a:t>Oper</a:t>
             </a:r>
             <a:r>
-              <a:rPr lang="sk-SK" sz="4000" dirty="0" err="1"/>
+              <a:rPr lang="sk-SK" sz="4000" dirty="0" err="1">
+                <a:solidFill>
+                  <a:srgbClr val="FF0000"/>
+                </a:solidFill>
+                <a:highlight>
+                  <a:srgbClr val="00FFFF"/>
+                </a:highlight>
+              </a:rPr>
               <a:t>átory</a:t>
             </a:r>
             <a:r>
-              <a:rPr lang="sk-SK" sz="4000" dirty="0"/>
+              <a:rPr lang="sk-SK" sz="4000" dirty="0">
+                <a:solidFill>
+                  <a:srgbClr val="FF0000"/>
+                </a:solidFill>
+                <a:highlight>
+                  <a:srgbClr val="00FFFF"/>
+                </a:highlight>
+              </a:rPr>
               <a:t> priradenia</a:t>
             </a:r>
           </a:p>
@@ -4576,27 +4658,58 @@
               <a:buNone/>
             </a:pPr>
             <a:r>
-              <a:rPr lang="sk-SK" dirty="0"/>
+              <a:rPr lang="sk-SK" dirty="0">
+                <a:solidFill>
+                  <a:srgbClr val="FF0000"/>
+                </a:solidFill>
+                <a:highlight>
+                  <a:srgbClr val="00FFFF"/>
+                </a:highlight>
+              </a:rPr>
               <a:t>Operátor </a:t>
             </a:r>
             <a:r>
               <a:rPr lang="sk-SK" dirty="0">
-                <a:highlight>
-                  <a:srgbClr val="FFFF00"/>
+                <a:solidFill>
+                  <a:srgbClr val="FF0000"/>
+                </a:solidFill>
+                <a:highlight>
+                  <a:srgbClr val="00FFFF"/>
                 </a:highlight>
                 <a:latin typeface="Consolas" panose="020B0609020204030204" pitchFamily="49" charset="0"/>
               </a:rPr>
               <a:t>=</a:t>
             </a:r>
             <a:r>
-              <a:rPr lang="sk-SK" dirty="0"/>
+              <a:rPr lang="sk-SK" dirty="0">
+                <a:solidFill>
+                  <a:srgbClr val="FF0000"/>
+                </a:solidFill>
+                <a:highlight>
+                  <a:srgbClr val="00FFFF"/>
+                </a:highlight>
+              </a:rPr>
               <a:t> kopíruje primitívnu hodnotu, </a:t>
             </a:r>
             <a:br>
-              <a:rPr lang="sk-SK" dirty="0"/>
+              <a:rPr lang="sk-SK" dirty="0">
+                <a:solidFill>
+                  <a:srgbClr val="FF0000"/>
+                </a:solidFill>
+                <a:highlight>
+                  <a:srgbClr val="00FFFF"/>
+                </a:highlight>
+              </a:rPr>
             </a:br>
             <a:r>
-              <a:rPr lang="sk-SK" dirty="0"/>
+              <a:rPr lang="sk-SK" dirty="0">
+                <a:solidFill>
+                  <a:srgbClr val="FF0000"/>
+                </a:solidFill>
+                <a:highlight>
+                  <a:srgbClr val="00FFFF"/>
+                </a:highlight>
+              </a:rPr>
               <a:t>pri objektoch kopíruje referenciu na objekt</a:t>
             </a:r>
           </a:p>
@@ -4609,6 +4722,9 @@
             </a:pPr>
             <a:r>
               <a:rPr lang="sk-SK" dirty="0">
+                <a:solidFill>
+                  <a:srgbClr val="FF0000"/>
+                </a:solidFill>
                 <a:highlight>
                   <a:srgbClr val="FFFF00"/>
                 </a:highlight>
@@ -4617,8 +4733,16 @@
               <a:t>+= -= *= /= %=</a:t>
             </a:r>
             <a:r>
+              <a:rPr lang="sk-SK" dirty="0">
+                <a:solidFill>
+                  <a:srgbClr val="FF0000"/>
+                </a:solidFill>
+              </a:rPr>
+              <a:t>  </a:t>
+            </a:r>
+            <a:r>
               <a:rPr lang="sk-SK" dirty="0"/>
-              <a:t>  priradenie s operáciou</a:t>
+              <a:t>priradenie s operáciou</a:t>
             </a:r>
             <a:endParaRPr lang="sk-SK" sz="2400" dirty="0">
               <a:highlight>
@@ -4657,6 +4781,9 @@
             </a:pPr>
             <a:r>
               <a:rPr lang="sk-SK" sz="2800" dirty="0">
+                <a:solidFill>
+                  <a:srgbClr val="FF0000"/>
+                </a:solidFill>
                 <a:highlight>
                   <a:srgbClr val="FFFF00"/>
                 </a:highlight>
@@ -4665,11 +4792,21 @@
               <a:t>++x</a:t>
             </a:r>
             <a:r>
-              <a:rPr lang="sk-SK" sz="2800" dirty="0"/>
+              <a:rPr lang="sk-SK" sz="2800" dirty="0">
+                <a:solidFill>
+                  <a:srgbClr val="FF0000"/>
+                </a:solidFill>
+                <a:highlight>
+                  <a:srgbClr val="00FFFF"/>
+                </a:highlight>
+              </a:rPr>
               <a:t> najprv zvýši </a:t>
             </a:r>
             <a:r>
               <a:rPr lang="sk-SK" sz="2800" dirty="0">
+                <a:solidFill>
+                  <a:srgbClr val="FF0000"/>
+                </a:solidFill>
                 <a:highlight>
                   <a:srgbClr val="FFFF00"/>
                 </a:highlight>
@@ -4678,7 +4815,14 @@
               <a:t>x</a:t>
             </a:r>
             <a:r>
-              <a:rPr lang="sk-SK" sz="2800" dirty="0"/>
+              <a:rPr lang="sk-SK" sz="2800" dirty="0">
+                <a:solidFill>
+                  <a:srgbClr val="FF0000"/>
+                </a:solidFill>
+                <a:highlight>
+                  <a:srgbClr val="00FFFF"/>
+                </a:highlight>
+              </a:rPr>
               <a:t>, potom vráti novú hodnotu</a:t>
             </a:r>
           </a:p>
@@ -4691,6 +4835,9 @@
             </a:pPr>
             <a:r>
               <a:rPr lang="sk-SK" sz="2800" dirty="0">
+                <a:solidFill>
+                  <a:srgbClr val="FF0000"/>
+                </a:solidFill>
                 <a:highlight>
                   <a:srgbClr val="FFFF00"/>
                 </a:highlight>
@@ -4699,11 +4846,21 @@
               <a:t>x++</a:t>
             </a:r>
             <a:r>
-              <a:rPr lang="sk-SK" sz="2800" dirty="0"/>
+              <a:rPr lang="sk-SK" sz="2800" dirty="0">
+                <a:solidFill>
+                  <a:srgbClr val="FF0000"/>
+                </a:solidFill>
+                <a:highlight>
+                  <a:srgbClr val="00FFFF"/>
+                </a:highlight>
+              </a:rPr>
               <a:t> najprv vráti starú hodnotu </a:t>
             </a:r>
             <a:r>
               <a:rPr lang="sk-SK" sz="2800" dirty="0">
+                <a:solidFill>
+                  <a:srgbClr val="FF0000"/>
+                </a:solidFill>
                 <a:highlight>
                   <a:srgbClr val="FFFF00"/>
                 </a:highlight>
@@ -4712,7 +4869,14 @@
               <a:t>x</a:t>
             </a:r>
             <a:r>
-              <a:rPr lang="sk-SK" sz="2800" dirty="0"/>
+              <a:rPr lang="sk-SK" sz="2800" dirty="0">
+                <a:solidFill>
+                  <a:srgbClr val="FF0000"/>
+                </a:solidFill>
+                <a:highlight>
+                  <a:srgbClr val="00FFFF"/>
+                </a:highlight>
+              </a:rPr>
               <a:t>, potom ju zvýši</a:t>
             </a:r>
           </a:p>
@@ -4724,6 +4888,9 @@
               <a:buNone/>
             </a:pPr>
             <a:endParaRPr lang="pl-PL" sz="2400" dirty="0">
+              <a:solidFill>
+                <a:srgbClr val="FF0000"/>
+              </a:solidFill>
               <a:highlight>
                 <a:srgbClr val="FFFF00"/>
               </a:highlight>
@@ -4739,6 +4906,9 @@
             </a:pPr>
             <a:r>
               <a:rPr lang="pl-PL" sz="2400" dirty="0">
+                <a:solidFill>
+                  <a:srgbClr val="FF0000"/>
+                </a:solidFill>
                 <a:highlight>
                   <a:srgbClr val="FFFF00"/>
                 </a:highlight>
@@ -4756,6 +4926,9 @@
             </a:pPr>
             <a:r>
               <a:rPr lang="pl-PL" sz="2400" dirty="0">
+                <a:solidFill>
+                  <a:srgbClr val="FF0000"/>
+                </a:solidFill>
                 <a:highlight>
                   <a:srgbClr val="FFFF00"/>
                 </a:highlight>
@@ -4773,6 +4946,9 @@
             </a:pPr>
             <a:r>
               <a:rPr lang="pl-PL" sz="2400" dirty="0">
+                <a:solidFill>
+                  <a:srgbClr val="FF0000"/>
+                </a:solidFill>
                 <a:highlight>
                   <a:srgbClr val="FFFF00"/>
                 </a:highlight>
@@ -4781,6 +4957,9 @@
               <a:t>int z = ++x;   // z == 7, x == 7</a:t>
             </a:r>
             <a:endParaRPr lang="sk-SK" sz="2400" dirty="0">
+              <a:solidFill>
+                <a:srgbClr val="FF0000"/>
+              </a:solidFill>
               <a:highlight>
                 <a:srgbClr val="FFFF00"/>
               </a:highlight>
@@ -4914,7 +5093,7 @@
                   <a:noFill/>
                 </a:ln>
                 <a:solidFill>
-                  <a:prstClr val="black"/>
+                  <a:srgbClr val="FF0000"/>
                 </a:solidFill>
                 <a:effectLst/>
                 <a:highlight>
@@ -4927,6 +5106,43 @@
                 <a:cs typeface="+mn-cs"/>
               </a:rPr>
               <a:t>== != &lt; &gt; &lt;= &gt;=</a:t>
+            </a:r>
+            <a:r>
+              <a:rPr kumimoji="0" lang="sk-SK" sz="2800" b="0" i="0" u="none" strike="noStrike" kern="1200" cap="none" spc="0" normalizeH="0" baseline="0" noProof="0" dirty="0">
+                <a:ln>
+                  <a:noFill/>
+                </a:ln>
+                <a:solidFill>
+                  <a:srgbClr val="FF0000"/>
+                </a:solidFill>
+                <a:effectLst/>
+                <a:uLnTx/>
+                <a:uFillTx/>
+                <a:latin typeface="Aptos" panose="02110004020202020204"/>
+                <a:ea typeface="+mn-ea"/>
+                <a:cs typeface="+mn-cs"/>
+              </a:rPr>
+              <a:t>  </a:t>
+            </a:r>
+            <a:r>
+              <a:rPr kumimoji="0" lang="sk-SK" sz="2800" b="0" i="0" u="none" strike="noStrike" kern="1200" cap="none" spc="0" normalizeH="0" baseline="0" noProof="0" dirty="0">
+                <a:ln>
+                  <a:noFill/>
+                </a:ln>
+                <a:solidFill>
+                  <a:srgbClr val="FF0000"/>
+                </a:solidFill>
+                <a:effectLst/>
+                <a:highlight>
+                  <a:srgbClr val="00FFFF"/>
+                </a:highlight>
+                <a:uLnTx/>
+                <a:uFillTx/>
+                <a:latin typeface="Aptos" panose="02110004020202020204"/>
+                <a:ea typeface="+mn-ea"/>
+                <a:cs typeface="+mn-cs"/>
+              </a:rPr>
+              <a:t>výsledok je boolean </a:t>
             </a:r>
             <a:r>
               <a:rPr kumimoji="0" lang="sk-SK" sz="2800" b="0" i="0" u="none" strike="noStrike" kern="1200" cap="none" spc="0" normalizeH="0" baseline="0" noProof="0" dirty="0">
@@ -4943,7 +5159,7 @@
                 <a:ea typeface="+mn-ea"/>
                 <a:cs typeface="+mn-cs"/>
               </a:rPr>
-              <a:t> - výsledok je boolean hodnota </a:t>
+              <a:t>hodnota </a:t>
             </a:r>
             <a:r>
               <a:rPr kumimoji="0" lang="sk-SK" sz="2800" b="0" i="0" u="none" strike="noStrike" kern="1200" cap="none" spc="0" normalizeH="0" baseline="0" noProof="0" dirty="0" err="1">
@@ -5050,6 +5266,9 @@
             </a:pPr>
             <a:r>
               <a:rPr lang="sk-SK" dirty="0" err="1">
+                <a:solidFill>
+                  <a:srgbClr val="FF0000"/>
+                </a:solidFill>
                 <a:highlight>
                   <a:srgbClr val="FFFF00"/>
                 </a:highlight>
@@ -5058,19 +5277,55 @@
               <a:t>instanceof</a:t>
             </a:r>
             <a:r>
-              <a:rPr lang="sk-SK" dirty="0"/>
-              <a:t>  zistí, či daný objekt je inštancia </a:t>
-            </a:r>
-            <a:r>
-              <a:rPr lang="sk-SK" b="1" dirty="0"/>
+              <a:rPr lang="sk-SK" dirty="0">
+                <a:solidFill>
+                  <a:srgbClr val="FF0000"/>
+                </a:solidFill>
+              </a:rPr>
+              <a:t>  </a:t>
+            </a:r>
+            <a:r>
+              <a:rPr lang="sk-SK" dirty="0">
+                <a:solidFill>
+                  <a:srgbClr val="FF0000"/>
+                </a:solidFill>
+                <a:highlight>
+                  <a:srgbClr val="00FFFF"/>
+                </a:highlight>
+              </a:rPr>
+              <a:t>zistí, či daný objekt je inštancia </a:t>
+            </a:r>
+            <a:r>
+              <a:rPr lang="sk-SK" b="1" dirty="0">
+                <a:solidFill>
+                  <a:srgbClr val="FF0000"/>
+                </a:solidFill>
+                <a:highlight>
+                  <a:srgbClr val="00FFFF"/>
+                </a:highlight>
+              </a:rPr>
               <a:t>typu</a:t>
             </a:r>
             <a:r>
-              <a:rPr lang="sk-SK" dirty="0"/>
+              <a:rPr lang="sk-SK" dirty="0">
+                <a:solidFill>
+                  <a:srgbClr val="FF0000"/>
+                </a:solidFill>
+                <a:highlight>
+                  <a:srgbClr val="00FFFF"/>
+                </a:highlight>
+              </a:rPr>
               <a:t> alebo implementuje </a:t>
             </a:r>
             <a:r>
-              <a:rPr lang="sk-SK" b="1" dirty="0"/>
+              <a:rPr lang="sk-SK" b="1" dirty="0">
+                <a:solidFill>
+                  <a:srgbClr val="FF0000"/>
+                </a:solidFill>
+                <a:highlight>
+                  <a:srgbClr val="00FFFF"/>
+                </a:highlight>
+              </a:rPr>
               <a:t>rozhranie</a:t>
             </a:r>
           </a:p>
@@ -5498,7 +5753,14 @@
           <a:lstStyle/>
           <a:p>
             <a:r>
-              <a:rPr lang="sk-SK" sz="4000" dirty="0"/>
+              <a:rPr lang="sk-SK" sz="4000" dirty="0">
+                <a:solidFill>
+                  <a:srgbClr val="FF0000"/>
+                </a:solidFill>
+                <a:highlight>
+                  <a:srgbClr val="00FFFF"/>
+                </a:highlight>
+              </a:rPr>
               <a:t>Bitové operátory</a:t>
             </a:r>
           </a:p>
@@ -5540,6 +5802,9 @@
             </a:pPr>
             <a:r>
               <a:rPr lang="sk-SK" dirty="0">
+                <a:solidFill>
+                  <a:srgbClr val="FF0000"/>
+                </a:solidFill>
                 <a:highlight>
                   <a:srgbClr val="FFFF00"/>
                 </a:highlight>
@@ -5547,7 +5812,11 @@
               </a:rPr>
               <a:t>&amp;  |  ^  ~  &gt;&gt;  &lt;&lt;  &gt;&gt;&gt;</a:t>
             </a:r>
-            <a:endParaRPr lang="sk-SK" dirty="0"/>
+            <a:endParaRPr lang="sk-SK" dirty="0">
+              <a:solidFill>
+                <a:srgbClr val="FF0000"/>
+              </a:solidFill>
+            </a:endParaRPr>
           </a:p>
           <a:p>
             <a:pPr marL="0" indent="0">
@@ -5557,7 +5826,14 @@
               <a:buNone/>
             </a:pPr>
             <a:r>
-              <a:rPr lang="sk-SK" dirty="0"/>
+              <a:rPr lang="sk-SK" dirty="0">
+                <a:solidFill>
+                  <a:srgbClr val="FF0000"/>
+                </a:solidFill>
+                <a:highlight>
+                  <a:srgbClr val="00FFFF"/>
+                </a:highlight>
+              </a:rPr>
               <a:t>Nepliesť si ich s logickými</a:t>
             </a:r>
           </a:p>
@@ -5966,7 +6242,14 @@
           <a:lstStyle/>
           <a:p>
             <a:r>
-              <a:rPr lang="sk-SK" sz="4000" dirty="0"/>
+              <a:rPr lang="sk-SK" sz="4000" dirty="0">
+                <a:solidFill>
+                  <a:srgbClr val="FF0000"/>
+                </a:solidFill>
+                <a:highlight>
+                  <a:srgbClr val="00FFFF"/>
+                </a:highlight>
+              </a:rPr>
               <a:t>Logické operátory</a:t>
             </a:r>
           </a:p>
@@ -6008,6 +6291,9 @@
             </a:pPr>
             <a:r>
               <a:rPr lang="sk-SK" dirty="0">
+                <a:solidFill>
+                  <a:srgbClr val="FF0000"/>
+                </a:solidFill>
                 <a:highlight>
                   <a:srgbClr val="FFFF00"/>
                 </a:highlight>
@@ -6016,8 +6302,27 @@
               <a:t>&amp;&amp;  ||  !</a:t>
             </a:r>
             <a:r>
+              <a:rPr lang="sk-SK" dirty="0">
+                <a:solidFill>
+                  <a:srgbClr val="FF0000"/>
+                </a:solidFill>
+              </a:rPr>
+              <a:t> </a:t>
+            </a:r>
+            <a:r>
               <a:rPr lang="sk-SK" dirty="0"/>
-              <a:t> - pracujú s boolean hodnotami</a:t>
+              <a:t>- </a:t>
+            </a:r>
+            <a:r>
+              <a:rPr lang="sk-SK" dirty="0">
+                <a:solidFill>
+                  <a:srgbClr val="FF0000"/>
+                </a:solidFill>
+                <a:highlight>
+                  <a:srgbClr val="00FFFF"/>
+                </a:highlight>
+              </a:rPr>
+              <a:t>pracujú s boolean hodnotami</a:t>
             </a:r>
           </a:p>
           <a:p>
@@ -6031,15 +6336,32 @@
               <a:buNone/>
             </a:pPr>
             <a:r>
-              <a:rPr lang="sk-SK" b="1" dirty="0" err="1"/>
+              <a:rPr lang="sk-SK" b="1" dirty="0" err="1">
+                <a:solidFill>
+                  <a:srgbClr val="FF0000"/>
+                </a:solidFill>
+                <a:highlight>
+                  <a:srgbClr val="00FFFF"/>
+                </a:highlight>
+              </a:rPr>
               <a:t>short-circuit</a:t>
             </a:r>
             <a:r>
-              <a:rPr lang="sk-SK" dirty="0"/>
+              <a:rPr lang="sk-SK" dirty="0">
+                <a:solidFill>
+                  <a:srgbClr val="FF0000"/>
+                </a:solidFill>
+                <a:highlight>
+                  <a:srgbClr val="00FFFF"/>
+                </a:highlight>
+              </a:rPr>
               <a:t> - predčasné ukončenie, ak už vieme, či výsledok bude </a:t>
             </a:r>
             <a:r>
               <a:rPr lang="sk-SK" dirty="0" err="1">
+                <a:solidFill>
+                  <a:srgbClr val="FF0000"/>
+                </a:solidFill>
                 <a:highlight>
                   <a:srgbClr val="FFFF00"/>
                 </a:highlight>
@@ -6048,11 +6370,37 @@
               <a:t>true</a:t>
             </a:r>
             <a:r>
-              <a:rPr lang="sk-SK" dirty="0"/>
-              <a:t> alebo </a:t>
+              <a:rPr lang="sk-SK" dirty="0">
+                <a:solidFill>
+                  <a:srgbClr val="FF0000"/>
+                </a:solidFill>
+              </a:rPr>
+              <a:t> </a:t>
+            </a:r>
+            <a:r>
+              <a:rPr lang="sk-SK" dirty="0">
+                <a:solidFill>
+                  <a:srgbClr val="FF0000"/>
+                </a:solidFill>
+                <a:highlight>
+                  <a:srgbClr val="00FFFF"/>
+                </a:highlight>
+              </a:rPr>
+              <a:t>alebo</a:t>
+            </a:r>
+            <a:r>
+              <a:rPr lang="sk-SK" dirty="0">
+                <a:solidFill>
+                  <a:srgbClr val="FF0000"/>
+                </a:solidFill>
+              </a:rPr>
+              <a:t> </a:t>
             </a:r>
             <a:r>
               <a:rPr lang="sk-SK" dirty="0" err="1">
+                <a:solidFill>
+                  <a:srgbClr val="FF0000"/>
+                </a:solidFill>
                 <a:highlight>
                   <a:srgbClr val="FFFF00"/>
                 </a:highlight>
@@ -6061,6 +6409,9 @@
               <a:t>false</a:t>
             </a:r>
             <a:endParaRPr lang="sk-SK" dirty="0">
+              <a:solidFill>
+                <a:srgbClr val="FF0000"/>
+              </a:solidFill>
               <a:highlight>
                 <a:srgbClr val="FFFF00"/>
               </a:highlight>
